--- a/CV/RBU_v2.pptx
+++ b/CV/RBU_v2.pptx
@@ -250,7 +250,7 @@
             <a:fld id="{86C988DC-9DE3-4390-97AB-D61B85DACE57}" type="datetimeFigureOut">
               <a:rPr lang="pt-PT" sz="900" smtClean="0"/>
               <a:pPr/>
-              <a:t>08/09/2025</a:t>
+              <a:t>27/11/2025</a:t>
             </a:fld>
             <a:endParaRPr lang="pt-PT" sz="900"/>
           </a:p>
@@ -429,7 +429,7 @@
             <a:fld id="{0835B8F7-DAC4-4931-8AED-4356A8B2FD64}" type="datetimeFigureOut">
               <a:rPr lang="pt-BR" smtClean="0"/>
               <a:pPr/>
-              <a:t>08/09/2025</a:t>
+              <a:t>27/11/2025</a:t>
             </a:fld>
             <a:endParaRPr lang="pt-BR"/>
           </a:p>
@@ -1481,7 +1481,7 @@
                   <a:srgbClr val="FFFFFF"/>
                 </a:solidFill>
               </a:rPr>
-              <a:t>RBU</a:t>
+              <a:t>RBF</a:t>
             </a:r>
             <a:endParaRPr kumimoji="0" lang="en-GB" sz="1600" b="1" i="0" u="none" strike="noStrike" kern="1200" cap="none" spc="0" normalizeH="0" baseline="0" noProof="0" dirty="0">
               <a:ln>
@@ -1659,7 +1659,7 @@
               <a:defRPr/>
             </a:pPr>
             <a:r>
-              <a:rPr lang="en-US" sz="1000" dirty="0">
+              <a:rPr lang="en-US" sz="1050" dirty="0">
                 <a:solidFill>
                   <a:prstClr val="black"/>
                 </a:solidFill>
@@ -1670,27 +1670,17 @@
             </a:r>
           </a:p>
           <a:p>
-            <a:pPr marL="0" marR="0" lvl="2" indent="0" defTabSz="957712" rtl="0" eaLnBrk="1" fontAlgn="auto" latinLnBrk="0" hangingPunct="1">
-              <a:lnSpc>
-                <a:spcPct val="100000"/>
-              </a:lnSpc>
+            <a:pPr marL="0" lvl="2" defTabSz="957712">
               <a:spcBef>
                 <a:spcPts val="600"/>
               </a:spcBef>
-              <a:spcAft>
-                <a:spcPts val="0"/>
-              </a:spcAft>
               <a:buClr>
                 <a:srgbClr val="0098C7"/>
               </a:buClr>
-              <a:buSzTx/>
-              <a:buFontTx/>
-              <a:buNone/>
-              <a:tabLst/>
-              <a:defRPr/>
-            </a:pPr>
-            <a:r>
-              <a:rPr lang="en-US" sz="1000" dirty="0">
+              <a:defRPr/>
+            </a:pPr>
+            <a:r>
+              <a:rPr lang="en-US" sz="1050" dirty="0">
                 <a:solidFill>
                   <a:prstClr val="black"/>
                 </a:solidFill>
@@ -1868,7 +1858,7 @@
                 <a:latin typeface="Ubuntu" panose="020B0504030602030204" pitchFamily="34" charset="0"/>
                 <a:ea typeface="Verdana"/>
               </a:rPr>
-              <a:t>Adaptive </a:t>
+              <a:t>Classic </a:t>
             </a:r>
             <a:r>
               <a:rPr lang="en-US" sz="1000" dirty="0" err="1">
@@ -1888,7 +1878,7 @@
                 <a:latin typeface="Ubuntu" panose="020B0504030602030204" pitchFamily="34" charset="0"/>
                 <a:ea typeface="Verdana"/>
               </a:rPr>
-              <a:t> Training</a:t>
+              <a:t> using Ve</a:t>
             </a:r>
           </a:p>
           <a:p>
@@ -1912,90 +1902,25 @@
               <a:defRPr/>
             </a:pPr>
             <a:r>
-              <a:rPr lang="en-US" sz="1000" dirty="0">
+              <a:rPr lang="en-US" sz="1000" dirty="0" err="1">
                 <a:solidFill>
                   <a:prstClr val="black"/>
                 </a:solidFill>
                 <a:latin typeface="Ubuntu" panose="020B0504030602030204" pitchFamily="34" charset="0"/>
                 <a:ea typeface="Verdana"/>
               </a:rPr>
-              <a:t>Classic </a:t>
-            </a:r>
-            <a:r>
-              <a:rPr lang="en-US" sz="1000" dirty="0" err="1">
+              <a:t>Classic&amp;Adaptive</a:t>
+            </a:r>
+            <a:r>
+              <a:rPr lang="en-US" sz="1000" dirty="0">
                 <a:solidFill>
                   <a:prstClr val="black"/>
                 </a:solidFill>
                 <a:latin typeface="Ubuntu" panose="020B0504030602030204" pitchFamily="34" charset="0"/>
                 <a:ea typeface="Verdana"/>
               </a:rPr>
-              <a:t>Autosar</a:t>
-            </a:r>
-            <a:endParaRPr lang="en-US" sz="1000" dirty="0">
-              <a:solidFill>
-                <a:prstClr val="black"/>
-              </a:solidFill>
-              <a:latin typeface="Ubuntu" panose="020B0504030602030204" pitchFamily="34" charset="0"/>
-              <a:ea typeface="Verdana"/>
-            </a:endParaRPr>
-          </a:p>
-          <a:p>
-            <a:pPr marL="171442" marR="0" lvl="2" indent="-171442" algn="l" defTabSz="844044" rtl="0" eaLnBrk="1" fontAlgn="base" latinLnBrk="0" hangingPunct="1">
-              <a:lnSpc>
-                <a:spcPct val="100000"/>
-              </a:lnSpc>
-              <a:spcBef>
-                <a:spcPts val="600"/>
-              </a:spcBef>
-              <a:spcAft>
-                <a:spcPts val="0"/>
-              </a:spcAft>
-              <a:buClr>
-                <a:srgbClr val="272936"/>
-              </a:buClr>
-              <a:buSzPct val="100000"/>
-              <a:buFont typeface="Wingdings" panose="05000000000000000000" pitchFamily="2" charset="2"/>
-              <a:buChar char="§"/>
-              <a:tabLst/>
-              <a:defRPr/>
-            </a:pPr>
-            <a:r>
-              <a:rPr lang="en-US" sz="1000" dirty="0" err="1">
-                <a:solidFill>
-                  <a:prstClr val="black"/>
-                </a:solidFill>
-                <a:latin typeface="Ubuntu" panose="020B0504030602030204" pitchFamily="34" charset="0"/>
-                <a:ea typeface="Verdana"/>
-              </a:rPr>
-              <a:t>Autosar</a:t>
-            </a:r>
-            <a:r>
-              <a:rPr lang="en-US" sz="1000" dirty="0">
-                <a:solidFill>
-                  <a:prstClr val="black"/>
-                </a:solidFill>
-                <a:latin typeface="Ubuntu" panose="020B0504030602030204" pitchFamily="34" charset="0"/>
-                <a:ea typeface="Verdana"/>
-              </a:rPr>
-              <a:t> Classic EB </a:t>
-            </a:r>
-            <a:r>
-              <a:rPr lang="en-US" sz="1000" dirty="0" err="1">
-                <a:solidFill>
-                  <a:prstClr val="black"/>
-                </a:solidFill>
-                <a:latin typeface="Ubuntu" panose="020B0504030602030204" pitchFamily="34" charset="0"/>
-                <a:ea typeface="Verdana"/>
-              </a:rPr>
-              <a:t>Tressos</a:t>
-            </a:r>
-            <a:endParaRPr lang="en-US" sz="1000" dirty="0">
-              <a:solidFill>
-                <a:prstClr val="black"/>
-              </a:solidFill>
-              <a:latin typeface="Ubuntu" panose="020B0504030602030204" pitchFamily="34" charset="0"/>
-              <a:ea typeface="Verdana"/>
-            </a:endParaRPr>
+              <a:t> AUTOSAR using EB Tressos</a:t>
+            </a:r>
           </a:p>
           <a:p>
             <a:pPr marL="171442" marR="0" lvl="2" indent="-171442" algn="l" defTabSz="844044" rtl="0" eaLnBrk="1" fontAlgn="base" latinLnBrk="0" hangingPunct="1">
@@ -2252,7 +2177,52 @@
                 <a:ea typeface="+mn-ea"/>
                 <a:cs typeface="+mn-cs"/>
               </a:rPr>
-              <a:t>Senior Embedded Software Engineer – ALT240028 (RSA DEA EZ1)</a:t>
+              <a:t>      Senior Embedded Software Engineer / Tech Lead Replacement </a:t>
+            </a:r>
+            <a:r>
+              <a:rPr kumimoji="0" lang="en-US" sz="900" i="0" u="none" strike="noStrike" kern="1200" cap="none" spc="0" normalizeH="0" baseline="0" noProof="0" dirty="0">
+                <a:ln>
+                  <a:noFill/>
+                </a:ln>
+                <a:solidFill>
+                  <a:prstClr val="black"/>
+                </a:solidFill>
+                <a:effectLst/>
+                <a:uLnTx/>
+                <a:uFillTx/>
+                <a:latin typeface="Ubuntu"/>
+                <a:ea typeface="+mn-ea"/>
+                <a:cs typeface="+mn-cs"/>
+              </a:rPr>
+              <a:t>@ Capgemini Services Romania SRL Iasi, RO – Capgemini Engineering</a:t>
+            </a:r>
+          </a:p>
+          <a:p>
+            <a:pPr marL="0" marR="0" lvl="0" indent="0" algn="l" defTabSz="914400" rtl="0" eaLnBrk="1" fontAlgn="auto" latinLnBrk="0" hangingPunct="1">
+              <a:lnSpc>
+                <a:spcPct val="100000"/>
+              </a:lnSpc>
+              <a:spcBef>
+                <a:spcPts val="0"/>
+              </a:spcBef>
+              <a:spcAft>
+                <a:spcPts val="0"/>
+              </a:spcAft>
+              <a:buClrTx/>
+              <a:buSzTx/>
+              <a:buFontTx/>
+              <a:buNone/>
+              <a:tabLst/>
+              <a:defRPr/>
+            </a:pPr>
+            <a:r>
+              <a:rPr lang="en-US" sz="900" b="0" dirty="0">
+                <a:solidFill>
+                  <a:prstClr val="black"/>
+                </a:solidFill>
+                <a:latin typeface="Ubuntu"/>
+              </a:rPr>
+              <a:t>   </a:t>
             </a:r>
             <a:r>
               <a:rPr kumimoji="0" lang="en-US" sz="900" b="0" i="0" u="none" strike="noStrike" kern="1200" cap="none" spc="0" normalizeH="0" baseline="0" noProof="0" dirty="0">
@@ -2269,7 +2239,7 @@
                 <a:ea typeface="+mn-ea"/>
                 <a:cs typeface="+mn-cs"/>
               </a:rPr>
-              <a:t> </a:t>
+              <a:t>   </a:t>
             </a:r>
             <a:r>
               <a:rPr kumimoji="0" lang="en-US" sz="900" b="0" i="1" u="none" strike="noStrike" kern="1200" cap="none" spc="0" normalizeH="0" baseline="0" noProof="0" dirty="0">
@@ -2286,7 +2256,7 @@
                 <a:ea typeface="+mn-ea"/>
                 <a:cs typeface="+mn-cs"/>
               </a:rPr>
-              <a:t>(Jan 2024 – Mar 2025)</a:t>
+              <a:t>(Apr 2022 – Nov 2025)</a:t>
             </a:r>
             <a:endParaRPr kumimoji="0" lang="en-US" sz="900" b="0" i="0" u="none" strike="noStrike" kern="1200" cap="none" spc="0" normalizeH="0" baseline="0" noProof="0" dirty="0">
               <a:ln>
@@ -2336,75 +2306,7 @@
                 <a:ea typeface="+mn-ea"/>
                 <a:cs typeface="+mn-cs"/>
               </a:rPr>
-              <a:t>Implemented missing functionalities, updated detailed designs and .</a:t>
-            </a:r>
-            <a:r>
-              <a:rPr kumimoji="0" lang="en-US" sz="900" b="0" i="0" u="none" strike="noStrike" kern="1200" cap="none" spc="0" normalizeH="0" baseline="0" noProof="0" dirty="0" err="1">
-                <a:ln>
-                  <a:noFill/>
-                </a:ln>
-                <a:solidFill>
-                  <a:prstClr val="black"/>
-                </a:solidFill>
-                <a:effectLst/>
-                <a:uLnTx/>
-                <a:uFillTx/>
-                <a:latin typeface="Ubuntu"/>
-                <a:ea typeface="+mn-ea"/>
-                <a:cs typeface="+mn-cs"/>
-              </a:rPr>
-              <a:t>rnidl</a:t>
-            </a:r>
-            <a:r>
-              <a:rPr kumimoji="0" lang="en-US" sz="900" b="0" i="0" u="none" strike="noStrike" kern="1200" cap="none" spc="0" normalizeH="0" baseline="0" noProof="0" dirty="0">
-                <a:ln>
-                  <a:noFill/>
-                </a:ln>
-                <a:solidFill>
-                  <a:prstClr val="black"/>
-                </a:solidFill>
-                <a:effectLst/>
-                <a:uLnTx/>
-                <a:uFillTx/>
-                <a:latin typeface="Ubuntu"/>
-                <a:ea typeface="+mn-ea"/>
-                <a:cs typeface="+mn-cs"/>
-              </a:rPr>
-              <a:t> files, and developed unit/component tests using </a:t>
-            </a:r>
-            <a:r>
-              <a:rPr kumimoji="0" lang="en-US" sz="900" b="0" i="0" u="none" strike="noStrike" kern="1200" cap="none" spc="0" normalizeH="0" baseline="0" noProof="0" dirty="0" err="1">
-                <a:ln>
-                  <a:noFill/>
-                </a:ln>
-                <a:solidFill>
-                  <a:prstClr val="black"/>
-                </a:solidFill>
-                <a:effectLst/>
-                <a:uLnTx/>
-                <a:uFillTx/>
-                <a:latin typeface="Ubuntu"/>
-                <a:ea typeface="+mn-ea"/>
-                <a:cs typeface="+mn-cs"/>
-              </a:rPr>
-              <a:t>GoogleTest</a:t>
-            </a:r>
-            <a:r>
-              <a:rPr kumimoji="0" lang="en-US" sz="900" b="0" i="0" u="none" strike="noStrike" kern="1200" cap="none" spc="0" normalizeH="0" baseline="0" noProof="0" dirty="0">
-                <a:ln>
-                  <a:noFill/>
-                </a:ln>
-                <a:solidFill>
-                  <a:prstClr val="black"/>
-                </a:solidFill>
-                <a:effectLst/>
-                <a:uLnTx/>
-                <a:uFillTx/>
-                <a:latin typeface="Ubuntu"/>
-                <a:ea typeface="+mn-ea"/>
-                <a:cs typeface="+mn-cs"/>
-              </a:rPr>
-              <a:t>.</a:t>
+              <a:t>Optimized embedded modules → Reduced memory usage by 20%, improved responsiveness, and enabled smoother OEM integration.</a:t>
             </a:r>
           </a:p>
           <a:p>
@@ -2440,7 +2342,7 @@
                 <a:ea typeface="+mn-ea"/>
                 <a:cs typeface="+mn-cs"/>
               </a:rPr>
-              <a:t>Conducted bench testing, ran test campaigns, and updated CAPL scripts as needed.</a:t>
+              <a:t>Boosted collaboration efficiency → Cut issue resolution time by 30% across cross‑functional teams.</a:t>
             </a:r>
           </a:p>
           <a:p>
@@ -2476,11 +2378,11 @@
                 <a:ea typeface="+mn-ea"/>
                 <a:cs typeface="+mn-cs"/>
               </a:rPr>
-              <a:t>Delivered changes via Git and supported bug fixing for Mode Management and Body teams.</a:t>
-            </a:r>
-          </a:p>
-          <a:p>
-            <a:pPr marL="0" marR="0" lvl="0" indent="0" algn="l" defTabSz="914400" rtl="0" eaLnBrk="1" fontAlgn="auto" latinLnBrk="0" hangingPunct="1">
+              <a:t>Improved software quality → Enhanced CAPL test coverage, reducing post‑release bugs by 30%; implemented Google Test strategies, increasing code dependability by 25%.</a:t>
+            </a:r>
+          </a:p>
+          <a:p>
+            <a:pPr marL="171450" marR="0" lvl="0" indent="-171450" algn="l" defTabSz="914400" rtl="0" eaLnBrk="1" fontAlgn="auto" latinLnBrk="0" hangingPunct="1">
               <a:lnSpc>
                 <a:spcPct val="100000"/>
               </a:lnSpc>
@@ -2492,11 +2394,196 @@
               </a:spcAft>
               <a:buClrTx/>
               <a:buSzTx/>
-              <a:buFontTx/>
-              <a:buNone/>
+              <a:buFont typeface="Arial" panose="020B0604020202020204" pitchFamily="34" charset="0"/>
+              <a:buChar char="•"/>
               <a:tabLst/>
               <a:defRPr/>
             </a:pPr>
+            <a:r>
+              <a:rPr kumimoji="0" lang="en-US" sz="900" b="0" i="0" u="none" strike="noStrike" kern="1200" cap="none" spc="0" normalizeH="0" baseline="0" noProof="0" dirty="0">
+                <a:ln>
+                  <a:noFill/>
+                </a:ln>
+                <a:solidFill>
+                  <a:prstClr val="black"/>
+                </a:solidFill>
+                <a:effectLst/>
+                <a:uLnTx/>
+                <a:uFillTx/>
+                <a:latin typeface="Ubuntu"/>
+                <a:ea typeface="+mn-ea"/>
+                <a:cs typeface="+mn-cs"/>
+              </a:rPr>
+              <a:t>Delivered reliable integration → Oversaw embedded functionality with Trace32 and </a:t>
+            </a:r>
+            <a:r>
+              <a:rPr kumimoji="0" lang="en-US" sz="900" b="0" i="0" u="none" strike="noStrike" kern="1200" cap="none" spc="0" normalizeH="0" baseline="0" noProof="0" dirty="0" err="1">
+                <a:ln>
+                  <a:noFill/>
+                </a:ln>
+                <a:solidFill>
+                  <a:prstClr val="black"/>
+                </a:solidFill>
+                <a:effectLst/>
+                <a:uLnTx/>
+                <a:uFillTx/>
+                <a:latin typeface="Ubuntu"/>
+                <a:ea typeface="+mn-ea"/>
+                <a:cs typeface="+mn-cs"/>
+              </a:rPr>
+              <a:t>CANoe</a:t>
+            </a:r>
+            <a:r>
+              <a:rPr kumimoji="0" lang="en-US" sz="900" b="0" i="0" u="none" strike="noStrike" kern="1200" cap="none" spc="0" normalizeH="0" baseline="0" noProof="0" dirty="0">
+                <a:ln>
+                  <a:noFill/>
+                </a:ln>
+                <a:solidFill>
+                  <a:prstClr val="black"/>
+                </a:solidFill>
+                <a:effectLst/>
+                <a:uLnTx/>
+                <a:uFillTx/>
+                <a:latin typeface="Ubuntu"/>
+                <a:ea typeface="+mn-ea"/>
+                <a:cs typeface="+mn-cs"/>
+              </a:rPr>
+              <a:t>, ensuring successful system validation.</a:t>
+            </a:r>
+          </a:p>
+          <a:p>
+            <a:pPr marL="171450" marR="0" lvl="0" indent="-171450" algn="l" defTabSz="914400" rtl="0" eaLnBrk="1" fontAlgn="auto" latinLnBrk="0" hangingPunct="1">
+              <a:lnSpc>
+                <a:spcPct val="100000"/>
+              </a:lnSpc>
+              <a:spcBef>
+                <a:spcPts val="0"/>
+              </a:spcBef>
+              <a:spcAft>
+                <a:spcPts val="0"/>
+              </a:spcAft>
+              <a:buClrTx/>
+              <a:buSzTx/>
+              <a:buFont typeface="Arial" panose="020B0604020202020204" pitchFamily="34" charset="0"/>
+              <a:buChar char="•"/>
+              <a:tabLst/>
+              <a:defRPr/>
+            </a:pPr>
+            <a:r>
+              <a:rPr kumimoji="0" lang="en-US" sz="900" b="0" i="0" u="none" strike="noStrike" kern="1200" cap="none" spc="0" normalizeH="0" baseline="0" noProof="0" dirty="0">
+                <a:ln>
+                  <a:noFill/>
+                </a:ln>
+                <a:solidFill>
+                  <a:prstClr val="black"/>
+                </a:solidFill>
+                <a:effectLst/>
+                <a:uLnTx/>
+                <a:uFillTx/>
+                <a:latin typeface="Ubuntu"/>
+                <a:ea typeface="+mn-ea"/>
+                <a:cs typeface="+mn-cs"/>
+              </a:rPr>
+              <a:t>Ensured coding excellence → Reviewed and delivered 300+ Git commits, achieving 100% coding standards compliance and reducing debugging time by 25%.</a:t>
+            </a:r>
+          </a:p>
+          <a:p>
+            <a:pPr marL="171450" marR="0" lvl="0" indent="-171450" algn="l" defTabSz="914400" rtl="0" eaLnBrk="1" fontAlgn="auto" latinLnBrk="0" hangingPunct="1">
+              <a:lnSpc>
+                <a:spcPct val="100000"/>
+              </a:lnSpc>
+              <a:spcBef>
+                <a:spcPts val="0"/>
+              </a:spcBef>
+              <a:spcAft>
+                <a:spcPts val="0"/>
+              </a:spcAft>
+              <a:buClrTx/>
+              <a:buSzTx/>
+              <a:buFont typeface="Arial" panose="020B0604020202020204" pitchFamily="34" charset="0"/>
+              <a:buChar char="•"/>
+              <a:tabLst/>
+              <a:defRPr/>
+            </a:pPr>
+            <a:r>
+              <a:rPr kumimoji="0" lang="en-US" sz="900" b="0" i="0" u="none" strike="noStrike" kern="1200" cap="none" spc="0" normalizeH="0" baseline="0" noProof="0" dirty="0">
+                <a:ln>
+                  <a:noFill/>
+                </a:ln>
+                <a:solidFill>
+                  <a:prstClr val="black"/>
+                </a:solidFill>
+                <a:effectLst/>
+                <a:uLnTx/>
+                <a:uFillTx/>
+                <a:latin typeface="Ubuntu"/>
+                <a:ea typeface="+mn-ea"/>
+                <a:cs typeface="+mn-cs"/>
+              </a:rPr>
+              <a:t>Technical leadership → Acted as Tech Lead, resolving critical roadblocks, mentoring new members, and maintaining project continuity with direct client engagement.</a:t>
+            </a:r>
+          </a:p>
+          <a:p>
+            <a:pPr marL="171450" marR="0" lvl="0" indent="-171450" algn="l" defTabSz="914400" rtl="0" eaLnBrk="1" fontAlgn="auto" latinLnBrk="0" hangingPunct="1">
+              <a:lnSpc>
+                <a:spcPct val="100000"/>
+              </a:lnSpc>
+              <a:spcBef>
+                <a:spcPts val="0"/>
+              </a:spcBef>
+              <a:spcAft>
+                <a:spcPts val="0"/>
+              </a:spcAft>
+              <a:buClrTx/>
+              <a:buSzTx/>
+              <a:buFont typeface="Arial" panose="020B0604020202020204" pitchFamily="34" charset="0"/>
+              <a:buChar char="•"/>
+              <a:tabLst/>
+              <a:defRPr/>
+            </a:pPr>
+            <a:r>
+              <a:rPr kumimoji="0" lang="en-US" sz="900" b="0" i="0" u="none" strike="noStrike" kern="1200" cap="none" spc="0" normalizeH="0" baseline="0" noProof="0" dirty="0">
+                <a:ln>
+                  <a:noFill/>
+                </a:ln>
+                <a:solidFill>
+                  <a:prstClr val="black"/>
+                </a:solidFill>
+                <a:effectLst/>
+                <a:uLnTx/>
+                <a:uFillTx/>
+                <a:latin typeface="Ubuntu"/>
+                <a:ea typeface="+mn-ea"/>
+                <a:cs typeface="+mn-cs"/>
+              </a:rPr>
+              <a:t>Strong development expertise → Designed and implemented modular C/C++ functionalities with focus on maintainability.</a:t>
+            </a:r>
+          </a:p>
+          <a:p>
+            <a:pPr marR="0" lvl="0" algn="l" defTabSz="914400" rtl="0" eaLnBrk="1" fontAlgn="auto" latinLnBrk="0" hangingPunct="1">
+              <a:lnSpc>
+                <a:spcPct val="100000"/>
+              </a:lnSpc>
+              <a:spcBef>
+                <a:spcPts val="0"/>
+              </a:spcBef>
+              <a:spcAft>
+                <a:spcPts val="0"/>
+              </a:spcAft>
+              <a:buClrTx/>
+              <a:buSzTx/>
+              <a:tabLst/>
+              <a:defRPr/>
+            </a:pPr>
+            <a:r>
+              <a:rPr lang="en-US" sz="900" b="1" dirty="0">
+                <a:solidFill>
+                  <a:prstClr val="black"/>
+                </a:solidFill>
+                <a:latin typeface="Ubuntu"/>
+              </a:rPr>
+              <a:t>      </a:t>
+            </a:r>
             <a:r>
               <a:rPr kumimoji="0" lang="en-US" sz="900" b="1" i="0" u="none" strike="noStrike" kern="1200" cap="none" spc="0" normalizeH="0" baseline="0" noProof="0" dirty="0">
                 <a:ln>
@@ -2512,7 +2599,7 @@
                 <a:ea typeface="+mn-ea"/>
                 <a:cs typeface="+mn-cs"/>
               </a:rPr>
-              <a:t>Senior Embedded Software Engineer / Tech Lead Replacement</a:t>
+              <a:t>Senior Embedded Software Engineer – Space Platforms</a:t>
             </a:r>
             <a:r>
               <a:rPr kumimoji="0" lang="en-US" sz="900" b="0" i="0" u="none" strike="noStrike" kern="1200" cap="none" spc="0" normalizeH="0" baseline="0" noProof="0" dirty="0">
@@ -2532,6 +2619,32 @@
               <a:t> </a:t>
             </a:r>
             <a:r>
+              <a:rPr lang="en-US" sz="900" dirty="0">
+                <a:solidFill>
+                  <a:prstClr val="black"/>
+                </a:solidFill>
+                <a:latin typeface="Ubuntu"/>
+              </a:rPr>
+              <a:t>@ ENEA Software Development Services SRL Iasi, RO</a:t>
+            </a:r>
+          </a:p>
+          <a:p>
+            <a:pPr marR="0" lvl="0" algn="l" defTabSz="914400" rtl="0" eaLnBrk="1" fontAlgn="auto" latinLnBrk="0" hangingPunct="1">
+              <a:lnSpc>
+                <a:spcPct val="100000"/>
+              </a:lnSpc>
+              <a:spcBef>
+                <a:spcPts val="0"/>
+              </a:spcBef>
+              <a:spcAft>
+                <a:spcPts val="0"/>
+              </a:spcAft>
+              <a:buClrTx/>
+              <a:buSzTx/>
+              <a:tabLst/>
+              <a:defRPr/>
+            </a:pPr>
+            <a:r>
               <a:rPr kumimoji="0" lang="en-US" sz="900" b="0" i="1" u="none" strike="noStrike" kern="1200" cap="none" spc="0" normalizeH="0" baseline="0" noProof="0" dirty="0">
                 <a:ln>
                   <a:noFill/>
@@ -2546,7 +2659,7 @@
                 <a:ea typeface="+mn-ea"/>
                 <a:cs typeface="+mn-cs"/>
               </a:rPr>
-              <a:t>(Jun 2022 – Mar 2025)</a:t>
+              <a:t>      (Apr 2021 – Apr 2022)</a:t>
             </a:r>
             <a:endParaRPr kumimoji="0" lang="en-US" sz="900" b="0" i="0" u="none" strike="noStrike" kern="1200" cap="none" spc="0" normalizeH="0" baseline="0" noProof="0" dirty="0">
               <a:ln>
@@ -2596,7 +2709,7 @@
                 <a:ea typeface="+mn-ea"/>
                 <a:cs typeface="+mn-cs"/>
               </a:rPr>
-              <a:t>Analyzed requirements and created detailed designs in Confluence and .</a:t>
+              <a:t>Developed C/C++ software for space platforms, including state machines and </a:t>
             </a:r>
             <a:r>
               <a:rPr kumimoji="0" lang="en-US" sz="900" b="0" i="0" u="none" strike="noStrike" kern="1200" cap="none" spc="0" normalizeH="0" baseline="0" noProof="0" dirty="0" err="1">
@@ -2613,7 +2726,7 @@
                 <a:ea typeface="+mn-ea"/>
                 <a:cs typeface="+mn-cs"/>
               </a:rPr>
-              <a:t>rnidl</a:t>
+              <a:t>SpaceWire</a:t>
             </a:r>
             <a:r>
               <a:rPr kumimoji="0" lang="en-US" sz="900" b="0" i="0" u="none" strike="noStrike" kern="1200" cap="none" spc="0" normalizeH="0" baseline="0" noProof="0" dirty="0">
@@ -2630,7 +2743,7 @@
                 <a:ea typeface="+mn-ea"/>
                 <a:cs typeface="+mn-cs"/>
               </a:rPr>
-              <a:t> format.</a:t>
+              <a:t> data handling.</a:t>
             </a:r>
           </a:p>
           <a:p>
@@ -2666,7 +2779,7 @@
                 <a:ea typeface="+mn-ea"/>
                 <a:cs typeface="+mn-cs"/>
               </a:rPr>
-              <a:t>Implemented source code in Visual Studio Code and developed tests using </a:t>
+              <a:t>Used Xilinx SDK and Zynq-7000 SoC for communication between </a:t>
             </a:r>
             <a:r>
               <a:rPr kumimoji="0" lang="en-US" sz="900" b="0" i="0" u="none" strike="noStrike" kern="1200" cap="none" spc="0" normalizeH="0" baseline="0" noProof="0" dirty="0" err="1">
@@ -2683,7 +2796,7 @@
                 <a:ea typeface="+mn-ea"/>
                 <a:cs typeface="+mn-cs"/>
               </a:rPr>
-              <a:t>GoogleTest</a:t>
+              <a:t>RendezVous</a:t>
             </a:r>
             <a:r>
               <a:rPr kumimoji="0" lang="en-US" sz="900" b="0" i="0" u="none" strike="noStrike" kern="1200" cap="none" spc="0" normalizeH="0" baseline="0" noProof="0" dirty="0">
@@ -2700,7 +2813,7 @@
                 <a:ea typeface="+mn-ea"/>
                 <a:cs typeface="+mn-cs"/>
               </a:rPr>
-              <a:t>.</a:t>
+              <a:t> Sensor and On-Board Computer.</a:t>
             </a:r>
           </a:p>
           <a:p>
@@ -2736,7 +2849,7 @@
                 <a:ea typeface="+mn-ea"/>
                 <a:cs typeface="+mn-cs"/>
               </a:rPr>
-              <a:t>Reviewed and delivered code via Git, and validated functionality on bench setups.</a:t>
+              <a:t>Followed Agile methodology and version control with Git.</a:t>
             </a:r>
           </a:p>
           <a:p>
@@ -2772,7 +2885,7 @@
                 <a:ea typeface="+mn-ea"/>
                 <a:cs typeface="+mn-cs"/>
               </a:rPr>
-              <a:t>Senior Embedded Software Engineer – EZ1 Project (Renault)</a:t>
+              <a:t>       Senior Embedded Software Engineer – Automotive Platforms</a:t>
             </a:r>
             <a:r>
               <a:rPr kumimoji="0" lang="en-US" sz="900" b="0" i="0" u="none" strike="noStrike" kern="1200" cap="none" spc="0" normalizeH="0" baseline="0" noProof="0" dirty="0">
@@ -2789,8 +2902,27 @@
                 <a:ea typeface="+mn-ea"/>
                 <a:cs typeface="+mn-cs"/>
               </a:rPr>
-              <a:t> </a:t>
-            </a:r>
+              <a:t> @ Visteon Electronics EOOD Sofia, BG – contractor from RINF.TECH</a:t>
+            </a:r>
+          </a:p>
+          <a:p>
+            <a:pPr marL="0" marR="0" lvl="0" indent="0" algn="l" defTabSz="914400" rtl="0" eaLnBrk="1" fontAlgn="auto" latinLnBrk="0" hangingPunct="1">
+              <a:lnSpc>
+                <a:spcPct val="100000"/>
+              </a:lnSpc>
+              <a:spcBef>
+                <a:spcPts val="0"/>
+              </a:spcBef>
+              <a:spcAft>
+                <a:spcPts val="0"/>
+              </a:spcAft>
+              <a:buClrTx/>
+              <a:buSzTx/>
+              <a:buFontTx/>
+              <a:buNone/>
+              <a:tabLst/>
+              <a:defRPr/>
+            </a:pPr>
             <a:r>
               <a:rPr kumimoji="0" lang="en-US" sz="900" b="0" i="1" u="none" strike="noStrike" kern="1200" cap="none" spc="0" normalizeH="0" baseline="0" noProof="0" dirty="0">
                 <a:ln>
@@ -2806,7 +2938,7 @@
                 <a:ea typeface="+mn-ea"/>
                 <a:cs typeface="+mn-cs"/>
               </a:rPr>
-              <a:t>(Apr 2022 – ongoing)</a:t>
+              <a:t>      (Jun 2014 – May 2020)</a:t>
             </a:r>
             <a:endParaRPr kumimoji="0" lang="en-US" sz="900" b="0" i="0" u="none" strike="noStrike" kern="1200" cap="none" spc="0" normalizeH="0" baseline="0" noProof="0" dirty="0">
               <a:ln>
@@ -2856,7 +2988,7 @@
                 <a:ea typeface="+mn-ea"/>
                 <a:cs typeface="+mn-cs"/>
               </a:rPr>
-              <a:t>Contributed to the EZ1 automotive project, focusing on embedded software development and testing.</a:t>
+              <a:t>Developed and tested components like Speedometer, Odometer, and Language Settings using C/C++.</a:t>
             </a:r>
           </a:p>
           <a:p>
@@ -2892,7 +3024,145 @@
                 <a:ea typeface="+mn-ea"/>
                 <a:cs typeface="+mn-cs"/>
               </a:rPr>
-              <a:t>Supported integration and validation of new features and bug fixes across modules.</a:t>
+              <a:t>Designed unit tests with </a:t>
+            </a:r>
+            <a:r>
+              <a:rPr kumimoji="0" lang="en-US" sz="900" b="0" i="0" u="none" strike="noStrike" kern="1200" cap="none" spc="0" normalizeH="0" baseline="0" noProof="0" dirty="0" err="1">
+                <a:ln>
+                  <a:noFill/>
+                </a:ln>
+                <a:solidFill>
+                  <a:prstClr val="black"/>
+                </a:solidFill>
+                <a:effectLst/>
+                <a:uLnTx/>
+                <a:uFillTx/>
+                <a:latin typeface="Ubuntu"/>
+                <a:ea typeface="+mn-ea"/>
+                <a:cs typeface="+mn-cs"/>
+              </a:rPr>
+              <a:t>VectorCAST</a:t>
+            </a:r>
+            <a:r>
+              <a:rPr kumimoji="0" lang="en-US" sz="900" b="0" i="0" u="none" strike="noStrike" kern="1200" cap="none" spc="0" normalizeH="0" baseline="0" noProof="0" dirty="0">
+                <a:ln>
+                  <a:noFill/>
+                </a:ln>
+                <a:solidFill>
+                  <a:prstClr val="black"/>
+                </a:solidFill>
+                <a:effectLst/>
+                <a:uLnTx/>
+                <a:uFillTx/>
+                <a:latin typeface="Ubuntu"/>
+                <a:ea typeface="+mn-ea"/>
+                <a:cs typeface="+mn-cs"/>
+              </a:rPr>
+              <a:t> and implemented IPC for HMI communication.</a:t>
+            </a:r>
+          </a:p>
+          <a:p>
+            <a:pPr marL="171450" marR="0" lvl="0" indent="-171450" algn="l" defTabSz="914400" rtl="0" eaLnBrk="1" fontAlgn="auto" latinLnBrk="0" hangingPunct="1">
+              <a:lnSpc>
+                <a:spcPct val="100000"/>
+              </a:lnSpc>
+              <a:spcBef>
+                <a:spcPts val="0"/>
+              </a:spcBef>
+              <a:spcAft>
+                <a:spcPts val="0"/>
+              </a:spcAft>
+              <a:buClrTx/>
+              <a:buSzTx/>
+              <a:buFont typeface="Arial" panose="020B0604020202020204" pitchFamily="34" charset="0"/>
+              <a:buChar char="•"/>
+              <a:tabLst/>
+              <a:defRPr/>
+            </a:pPr>
+            <a:r>
+              <a:rPr kumimoji="0" lang="en-US" sz="900" b="0" i="0" u="none" strike="noStrike" kern="1200" cap="none" spc="0" normalizeH="0" baseline="0" noProof="0" dirty="0">
+                <a:ln>
+                  <a:noFill/>
+                </a:ln>
+                <a:solidFill>
+                  <a:prstClr val="black"/>
+                </a:solidFill>
+                <a:effectLst/>
+                <a:uLnTx/>
+                <a:uFillTx/>
+                <a:latin typeface="Ubuntu"/>
+                <a:ea typeface="+mn-ea"/>
+                <a:cs typeface="+mn-cs"/>
+              </a:rPr>
+              <a:t>Used </a:t>
+            </a:r>
+            <a:r>
+              <a:rPr kumimoji="0" lang="en-US" sz="900" b="0" i="0" u="none" strike="noStrike" kern="1200" cap="none" spc="0" normalizeH="0" baseline="0" noProof="0" dirty="0" err="1">
+                <a:ln>
+                  <a:noFill/>
+                </a:ln>
+                <a:solidFill>
+                  <a:prstClr val="black"/>
+                </a:solidFill>
+                <a:effectLst/>
+                <a:uLnTx/>
+                <a:uFillTx/>
+                <a:latin typeface="Ubuntu"/>
+                <a:ea typeface="+mn-ea"/>
+                <a:cs typeface="+mn-cs"/>
+              </a:rPr>
+              <a:t>Autosar</a:t>
+            </a:r>
+            <a:r>
+              <a:rPr kumimoji="0" lang="en-US" sz="900" b="0" i="0" u="none" strike="noStrike" kern="1200" cap="none" spc="0" normalizeH="0" baseline="0" noProof="0" dirty="0">
+                <a:ln>
+                  <a:noFill/>
+                </a:ln>
+                <a:solidFill>
+                  <a:prstClr val="black"/>
+                </a:solidFill>
+                <a:effectLst/>
+                <a:uLnTx/>
+                <a:uFillTx/>
+                <a:latin typeface="Ubuntu"/>
+                <a:ea typeface="+mn-ea"/>
+                <a:cs typeface="+mn-cs"/>
+              </a:rPr>
+              <a:t> RTE, Franca IDL, </a:t>
+            </a:r>
+            <a:r>
+              <a:rPr kumimoji="0" lang="en-US" sz="900" b="0" i="0" u="none" strike="noStrike" kern="1200" cap="none" spc="0" normalizeH="0" baseline="0" noProof="0" dirty="0" err="1">
+                <a:ln>
+                  <a:noFill/>
+                </a:ln>
+                <a:solidFill>
+                  <a:prstClr val="black"/>
+                </a:solidFill>
+                <a:effectLst/>
+                <a:uLnTx/>
+                <a:uFillTx/>
+                <a:latin typeface="Ubuntu"/>
+                <a:ea typeface="+mn-ea"/>
+                <a:cs typeface="+mn-cs"/>
+              </a:rPr>
+              <a:t>CANoe</a:t>
+            </a:r>
+            <a:r>
+              <a:rPr kumimoji="0" lang="en-US" sz="900" b="0" i="0" u="none" strike="noStrike" kern="1200" cap="none" spc="0" normalizeH="0" baseline="0" noProof="0" dirty="0">
+                <a:ln>
+                  <a:noFill/>
+                </a:ln>
+                <a:solidFill>
+                  <a:prstClr val="black"/>
+                </a:solidFill>
+                <a:effectLst/>
+                <a:uLnTx/>
+                <a:uFillTx/>
+                <a:latin typeface="Ubuntu"/>
+                <a:ea typeface="+mn-ea"/>
+                <a:cs typeface="+mn-cs"/>
+              </a:rPr>
+              <a:t>, Jenkins, and RTC in V-cycle and Agile environments.</a:t>
             </a:r>
           </a:p>
           <a:p>
@@ -2928,7 +3198,7 @@
                 <a:ea typeface="+mn-ea"/>
                 <a:cs typeface="+mn-cs"/>
               </a:rPr>
-              <a:t>Senior Embedded Software Engineer – Space Platforms</a:t>
+              <a:t>      Embedded Software Engineer</a:t>
             </a:r>
             <a:r>
               <a:rPr kumimoji="0" lang="en-US" sz="900" b="0" i="0" u="none" strike="noStrike" kern="1200" cap="none" spc="0" normalizeH="0" baseline="0" noProof="0" dirty="0">
@@ -2945,214 +3215,7 @@
                 <a:ea typeface="+mn-ea"/>
                 <a:cs typeface="+mn-cs"/>
               </a:rPr>
-              <a:t> </a:t>
-            </a:r>
-            <a:r>
-              <a:rPr kumimoji="0" lang="en-US" sz="900" b="0" i="1" u="none" strike="noStrike" kern="1200" cap="none" spc="0" normalizeH="0" baseline="0" noProof="0" dirty="0">
-                <a:ln>
-                  <a:noFill/>
-                </a:ln>
-                <a:solidFill>
-                  <a:prstClr val="black"/>
-                </a:solidFill>
-                <a:effectLst/>
-                <a:uLnTx/>
-                <a:uFillTx/>
-                <a:latin typeface="Ubuntu"/>
-                <a:ea typeface="+mn-ea"/>
-                <a:cs typeface="+mn-cs"/>
-              </a:rPr>
-              <a:t>(Apr 2021 – Apr 2022)</a:t>
-            </a:r>
-            <a:endParaRPr kumimoji="0" lang="en-US" sz="900" b="0" i="0" u="none" strike="noStrike" kern="1200" cap="none" spc="0" normalizeH="0" baseline="0" noProof="0" dirty="0">
-              <a:ln>
-                <a:noFill/>
-              </a:ln>
-              <a:solidFill>
-                <a:prstClr val="black"/>
-              </a:solidFill>
-              <a:effectLst/>
-              <a:uLnTx/>
-              <a:uFillTx/>
-              <a:latin typeface="Ubuntu"/>
-              <a:ea typeface="+mn-ea"/>
-              <a:cs typeface="+mn-cs"/>
-            </a:endParaRPr>
-          </a:p>
-          <a:p>
-            <a:pPr marL="171450" marR="0" lvl="0" indent="-171450" algn="l" defTabSz="914400" rtl="0" eaLnBrk="1" fontAlgn="auto" latinLnBrk="0" hangingPunct="1">
-              <a:lnSpc>
-                <a:spcPct val="100000"/>
-              </a:lnSpc>
-              <a:spcBef>
-                <a:spcPts val="0"/>
-              </a:spcBef>
-              <a:spcAft>
-                <a:spcPts val="0"/>
-              </a:spcAft>
-              <a:buClrTx/>
-              <a:buSzTx/>
-              <a:buFont typeface="Arial" panose="020B0604020202020204" pitchFamily="34" charset="0"/>
-              <a:buChar char="•"/>
-              <a:tabLst/>
-              <a:defRPr/>
-            </a:pPr>
-            <a:r>
-              <a:rPr kumimoji="0" lang="en-US" sz="900" b="0" i="0" u="none" strike="noStrike" kern="1200" cap="none" spc="0" normalizeH="0" baseline="0" noProof="0" dirty="0">
-                <a:ln>
-                  <a:noFill/>
-                </a:ln>
-                <a:solidFill>
-                  <a:prstClr val="black"/>
-                </a:solidFill>
-                <a:effectLst/>
-                <a:uLnTx/>
-                <a:uFillTx/>
-                <a:latin typeface="Ubuntu"/>
-                <a:ea typeface="+mn-ea"/>
-                <a:cs typeface="+mn-cs"/>
-              </a:rPr>
-              <a:t>Developed C/C++ software for space platforms, including state machines and </a:t>
-            </a:r>
-            <a:r>
-              <a:rPr kumimoji="0" lang="en-US" sz="900" b="0" i="0" u="none" strike="noStrike" kern="1200" cap="none" spc="0" normalizeH="0" baseline="0" noProof="0" dirty="0" err="1">
-                <a:ln>
-                  <a:noFill/>
-                </a:ln>
-                <a:solidFill>
-                  <a:prstClr val="black"/>
-                </a:solidFill>
-                <a:effectLst/>
-                <a:uLnTx/>
-                <a:uFillTx/>
-                <a:latin typeface="Ubuntu"/>
-                <a:ea typeface="+mn-ea"/>
-                <a:cs typeface="+mn-cs"/>
-              </a:rPr>
-              <a:t>SpaceWire</a:t>
-            </a:r>
-            <a:r>
-              <a:rPr kumimoji="0" lang="en-US" sz="900" b="0" i="0" u="none" strike="noStrike" kern="1200" cap="none" spc="0" normalizeH="0" baseline="0" noProof="0" dirty="0">
-                <a:ln>
-                  <a:noFill/>
-                </a:ln>
-                <a:solidFill>
-                  <a:prstClr val="black"/>
-                </a:solidFill>
-                <a:effectLst/>
-                <a:uLnTx/>
-                <a:uFillTx/>
-                <a:latin typeface="Ubuntu"/>
-                <a:ea typeface="+mn-ea"/>
-                <a:cs typeface="+mn-cs"/>
-              </a:rPr>
-              <a:t> data handling.</a:t>
-            </a:r>
-          </a:p>
-          <a:p>
-            <a:pPr marL="171450" marR="0" lvl="0" indent="-171450" algn="l" defTabSz="914400" rtl="0" eaLnBrk="1" fontAlgn="auto" latinLnBrk="0" hangingPunct="1">
-              <a:lnSpc>
-                <a:spcPct val="100000"/>
-              </a:lnSpc>
-              <a:spcBef>
-                <a:spcPts val="0"/>
-              </a:spcBef>
-              <a:spcAft>
-                <a:spcPts val="0"/>
-              </a:spcAft>
-              <a:buClrTx/>
-              <a:buSzTx/>
-              <a:buFont typeface="Arial" panose="020B0604020202020204" pitchFamily="34" charset="0"/>
-              <a:buChar char="•"/>
-              <a:tabLst/>
-              <a:defRPr/>
-            </a:pPr>
-            <a:r>
-              <a:rPr kumimoji="0" lang="en-US" sz="900" b="0" i="0" u="none" strike="noStrike" kern="1200" cap="none" spc="0" normalizeH="0" baseline="0" noProof="0" dirty="0">
-                <a:ln>
-                  <a:noFill/>
-                </a:ln>
-                <a:solidFill>
-                  <a:prstClr val="black"/>
-                </a:solidFill>
-                <a:effectLst/>
-                <a:uLnTx/>
-                <a:uFillTx/>
-                <a:latin typeface="Ubuntu"/>
-                <a:ea typeface="+mn-ea"/>
-                <a:cs typeface="+mn-cs"/>
-              </a:rPr>
-              <a:t>Used Xilinx SDK and Zynq-7000 SoC for communication between </a:t>
-            </a:r>
-            <a:r>
-              <a:rPr kumimoji="0" lang="en-US" sz="900" b="0" i="0" u="none" strike="noStrike" kern="1200" cap="none" spc="0" normalizeH="0" baseline="0" noProof="0" dirty="0" err="1">
-                <a:ln>
-                  <a:noFill/>
-                </a:ln>
-                <a:solidFill>
-                  <a:prstClr val="black"/>
-                </a:solidFill>
-                <a:effectLst/>
-                <a:uLnTx/>
-                <a:uFillTx/>
-                <a:latin typeface="Ubuntu"/>
-                <a:ea typeface="+mn-ea"/>
-                <a:cs typeface="+mn-cs"/>
-              </a:rPr>
-              <a:t>RendezVous</a:t>
-            </a:r>
-            <a:r>
-              <a:rPr kumimoji="0" lang="en-US" sz="900" b="0" i="0" u="none" strike="noStrike" kern="1200" cap="none" spc="0" normalizeH="0" baseline="0" noProof="0" dirty="0">
-                <a:ln>
-                  <a:noFill/>
-                </a:ln>
-                <a:solidFill>
-                  <a:prstClr val="black"/>
-                </a:solidFill>
-                <a:effectLst/>
-                <a:uLnTx/>
-                <a:uFillTx/>
-                <a:latin typeface="Ubuntu"/>
-                <a:ea typeface="+mn-ea"/>
-                <a:cs typeface="+mn-cs"/>
-              </a:rPr>
-              <a:t> Sensor and On-Board Computer.</a:t>
-            </a:r>
-          </a:p>
-          <a:p>
-            <a:pPr marL="171450" marR="0" lvl="0" indent="-171450" algn="l" defTabSz="914400" rtl="0" eaLnBrk="1" fontAlgn="auto" latinLnBrk="0" hangingPunct="1">
-              <a:lnSpc>
-                <a:spcPct val="100000"/>
-              </a:lnSpc>
-              <a:spcBef>
-                <a:spcPts val="0"/>
-              </a:spcBef>
-              <a:spcAft>
-                <a:spcPts val="0"/>
-              </a:spcAft>
-              <a:buClrTx/>
-              <a:buSzTx/>
-              <a:buFont typeface="Arial" panose="020B0604020202020204" pitchFamily="34" charset="0"/>
-              <a:buChar char="•"/>
-              <a:tabLst/>
-              <a:defRPr/>
-            </a:pPr>
-            <a:r>
-              <a:rPr kumimoji="0" lang="en-US" sz="900" b="0" i="0" u="none" strike="noStrike" kern="1200" cap="none" spc="0" normalizeH="0" baseline="0" noProof="0" dirty="0">
-                <a:ln>
-                  <a:noFill/>
-                </a:ln>
-                <a:solidFill>
-                  <a:prstClr val="black"/>
-                </a:solidFill>
-                <a:effectLst/>
-                <a:uLnTx/>
-                <a:uFillTx/>
-                <a:latin typeface="Ubuntu"/>
-                <a:ea typeface="+mn-ea"/>
-                <a:cs typeface="+mn-cs"/>
-              </a:rPr>
-              <a:t>Followed Agile methodology and version control with Git.</a:t>
+              <a:t> @ Continental Automotive Romania SRL Iasi, RO</a:t>
             </a:r>
           </a:p>
           <a:p>
@@ -3174,7 +3237,7 @@
               <a:defRPr/>
             </a:pPr>
             <a:r>
-              <a:rPr kumimoji="0" lang="en-US" sz="900" b="1" i="0" u="none" strike="noStrike" kern="1200" cap="none" spc="0" normalizeH="0" baseline="0" noProof="0" dirty="0">
+              <a:rPr kumimoji="0" lang="en-US" sz="900" b="0" i="1" u="none" strike="noStrike" kern="1200" cap="none" spc="0" normalizeH="0" baseline="0" noProof="0" dirty="0">
                 <a:ln>
                   <a:noFill/>
                 </a:ln>
@@ -3188,335 +3251,7 @@
                 <a:ea typeface="+mn-ea"/>
                 <a:cs typeface="+mn-cs"/>
               </a:rPr>
-              <a:t>Senior Embedded Software Engineer – Automotive Platforms</a:t>
-            </a:r>
-            <a:r>
-              <a:rPr kumimoji="0" lang="en-US" sz="900" b="0" i="0" u="none" strike="noStrike" kern="1200" cap="none" spc="0" normalizeH="0" baseline="0" noProof="0" dirty="0">
-                <a:ln>
-                  <a:noFill/>
-                </a:ln>
-                <a:solidFill>
-                  <a:prstClr val="black"/>
-                </a:solidFill>
-                <a:effectLst/>
-                <a:uLnTx/>
-                <a:uFillTx/>
-                <a:latin typeface="Ubuntu"/>
-                <a:ea typeface="+mn-ea"/>
-                <a:cs typeface="+mn-cs"/>
-              </a:rPr>
-              <a:t> </a:t>
-            </a:r>
-            <a:r>
-              <a:rPr kumimoji="0" lang="en-US" sz="900" b="0" i="1" u="none" strike="noStrike" kern="1200" cap="none" spc="0" normalizeH="0" baseline="0" noProof="0" dirty="0">
-                <a:ln>
-                  <a:noFill/>
-                </a:ln>
-                <a:solidFill>
-                  <a:prstClr val="black"/>
-                </a:solidFill>
-                <a:effectLst/>
-                <a:uLnTx/>
-                <a:uFillTx/>
-                <a:latin typeface="Ubuntu"/>
-                <a:ea typeface="+mn-ea"/>
-                <a:cs typeface="+mn-cs"/>
-              </a:rPr>
-              <a:t>(Jun 2014 – May 2020)</a:t>
-            </a:r>
-            <a:endParaRPr kumimoji="0" lang="en-US" sz="900" b="0" i="0" u="none" strike="noStrike" kern="1200" cap="none" spc="0" normalizeH="0" baseline="0" noProof="0" dirty="0">
-              <a:ln>
-                <a:noFill/>
-              </a:ln>
-              <a:solidFill>
-                <a:prstClr val="black"/>
-              </a:solidFill>
-              <a:effectLst/>
-              <a:uLnTx/>
-              <a:uFillTx/>
-              <a:latin typeface="Ubuntu"/>
-              <a:ea typeface="+mn-ea"/>
-              <a:cs typeface="+mn-cs"/>
-            </a:endParaRPr>
-          </a:p>
-          <a:p>
-            <a:pPr marL="171450" marR="0" lvl="0" indent="-171450" algn="l" defTabSz="914400" rtl="0" eaLnBrk="1" fontAlgn="auto" latinLnBrk="0" hangingPunct="1">
-              <a:lnSpc>
-                <a:spcPct val="100000"/>
-              </a:lnSpc>
-              <a:spcBef>
-                <a:spcPts val="0"/>
-              </a:spcBef>
-              <a:spcAft>
-                <a:spcPts val="0"/>
-              </a:spcAft>
-              <a:buClrTx/>
-              <a:buSzTx/>
-              <a:buFont typeface="Arial" panose="020B0604020202020204" pitchFamily="34" charset="0"/>
-              <a:buChar char="•"/>
-              <a:tabLst/>
-              <a:defRPr/>
-            </a:pPr>
-            <a:r>
-              <a:rPr kumimoji="0" lang="en-US" sz="900" b="0" i="0" u="none" strike="noStrike" kern="1200" cap="none" spc="0" normalizeH="0" baseline="0" noProof="0" dirty="0">
-                <a:ln>
-                  <a:noFill/>
-                </a:ln>
-                <a:solidFill>
-                  <a:prstClr val="black"/>
-                </a:solidFill>
-                <a:effectLst/>
-                <a:uLnTx/>
-                <a:uFillTx/>
-                <a:latin typeface="Ubuntu"/>
-                <a:ea typeface="+mn-ea"/>
-                <a:cs typeface="+mn-cs"/>
-              </a:rPr>
-              <a:t>Developed and tested components like Speedometer, Odometer, and Language Settings using C/C++.</a:t>
-            </a:r>
-          </a:p>
-          <a:p>
-            <a:pPr marL="171450" marR="0" lvl="0" indent="-171450" algn="l" defTabSz="914400" rtl="0" eaLnBrk="1" fontAlgn="auto" latinLnBrk="0" hangingPunct="1">
-              <a:lnSpc>
-                <a:spcPct val="100000"/>
-              </a:lnSpc>
-              <a:spcBef>
-                <a:spcPts val="0"/>
-              </a:spcBef>
-              <a:spcAft>
-                <a:spcPts val="0"/>
-              </a:spcAft>
-              <a:buClrTx/>
-              <a:buSzTx/>
-              <a:buFont typeface="Arial" panose="020B0604020202020204" pitchFamily="34" charset="0"/>
-              <a:buChar char="•"/>
-              <a:tabLst/>
-              <a:defRPr/>
-            </a:pPr>
-            <a:r>
-              <a:rPr kumimoji="0" lang="en-US" sz="900" b="0" i="0" u="none" strike="noStrike" kern="1200" cap="none" spc="0" normalizeH="0" baseline="0" noProof="0" dirty="0">
-                <a:ln>
-                  <a:noFill/>
-                </a:ln>
-                <a:solidFill>
-                  <a:prstClr val="black"/>
-                </a:solidFill>
-                <a:effectLst/>
-                <a:uLnTx/>
-                <a:uFillTx/>
-                <a:latin typeface="Ubuntu"/>
-                <a:ea typeface="+mn-ea"/>
-                <a:cs typeface="+mn-cs"/>
-              </a:rPr>
-              <a:t>Designed unit tests with </a:t>
-            </a:r>
-            <a:r>
-              <a:rPr kumimoji="0" lang="en-US" sz="900" b="0" i="0" u="none" strike="noStrike" kern="1200" cap="none" spc="0" normalizeH="0" baseline="0" noProof="0" dirty="0" err="1">
-                <a:ln>
-                  <a:noFill/>
-                </a:ln>
-                <a:solidFill>
-                  <a:prstClr val="black"/>
-                </a:solidFill>
-                <a:effectLst/>
-                <a:uLnTx/>
-                <a:uFillTx/>
-                <a:latin typeface="Ubuntu"/>
-                <a:ea typeface="+mn-ea"/>
-                <a:cs typeface="+mn-cs"/>
-              </a:rPr>
-              <a:t>VectorCAST</a:t>
-            </a:r>
-            <a:r>
-              <a:rPr kumimoji="0" lang="en-US" sz="900" b="0" i="0" u="none" strike="noStrike" kern="1200" cap="none" spc="0" normalizeH="0" baseline="0" noProof="0" dirty="0">
-                <a:ln>
-                  <a:noFill/>
-                </a:ln>
-                <a:solidFill>
-                  <a:prstClr val="black"/>
-                </a:solidFill>
-                <a:effectLst/>
-                <a:uLnTx/>
-                <a:uFillTx/>
-                <a:latin typeface="Ubuntu"/>
-                <a:ea typeface="+mn-ea"/>
-                <a:cs typeface="+mn-cs"/>
-              </a:rPr>
-              <a:t> and implemented IPC for HMI communication.</a:t>
-            </a:r>
-          </a:p>
-          <a:p>
-            <a:pPr marL="171450" marR="0" lvl="0" indent="-171450" algn="l" defTabSz="914400" rtl="0" eaLnBrk="1" fontAlgn="auto" latinLnBrk="0" hangingPunct="1">
-              <a:lnSpc>
-                <a:spcPct val="100000"/>
-              </a:lnSpc>
-              <a:spcBef>
-                <a:spcPts val="0"/>
-              </a:spcBef>
-              <a:spcAft>
-                <a:spcPts val="0"/>
-              </a:spcAft>
-              <a:buClrTx/>
-              <a:buSzTx/>
-              <a:buFont typeface="Arial" panose="020B0604020202020204" pitchFamily="34" charset="0"/>
-              <a:buChar char="•"/>
-              <a:tabLst/>
-              <a:defRPr/>
-            </a:pPr>
-            <a:r>
-              <a:rPr kumimoji="0" lang="en-US" sz="900" b="0" i="0" u="none" strike="noStrike" kern="1200" cap="none" spc="0" normalizeH="0" baseline="0" noProof="0" dirty="0">
-                <a:ln>
-                  <a:noFill/>
-                </a:ln>
-                <a:solidFill>
-                  <a:prstClr val="black"/>
-                </a:solidFill>
-                <a:effectLst/>
-                <a:uLnTx/>
-                <a:uFillTx/>
-                <a:latin typeface="Ubuntu"/>
-                <a:ea typeface="+mn-ea"/>
-                <a:cs typeface="+mn-cs"/>
-              </a:rPr>
-              <a:t>Used </a:t>
-            </a:r>
-            <a:r>
-              <a:rPr kumimoji="0" lang="en-US" sz="900" b="0" i="0" u="none" strike="noStrike" kern="1200" cap="none" spc="0" normalizeH="0" baseline="0" noProof="0" dirty="0" err="1">
-                <a:ln>
-                  <a:noFill/>
-                </a:ln>
-                <a:solidFill>
-                  <a:prstClr val="black"/>
-                </a:solidFill>
-                <a:effectLst/>
-                <a:uLnTx/>
-                <a:uFillTx/>
-                <a:latin typeface="Ubuntu"/>
-                <a:ea typeface="+mn-ea"/>
-                <a:cs typeface="+mn-cs"/>
-              </a:rPr>
-              <a:t>Autosar</a:t>
-            </a:r>
-            <a:r>
-              <a:rPr kumimoji="0" lang="en-US" sz="900" b="0" i="0" u="none" strike="noStrike" kern="1200" cap="none" spc="0" normalizeH="0" baseline="0" noProof="0" dirty="0">
-                <a:ln>
-                  <a:noFill/>
-                </a:ln>
-                <a:solidFill>
-                  <a:prstClr val="black"/>
-                </a:solidFill>
-                <a:effectLst/>
-                <a:uLnTx/>
-                <a:uFillTx/>
-                <a:latin typeface="Ubuntu"/>
-                <a:ea typeface="+mn-ea"/>
-                <a:cs typeface="+mn-cs"/>
-              </a:rPr>
-              <a:t> RTE, Franca IDL, </a:t>
-            </a:r>
-            <a:r>
-              <a:rPr kumimoji="0" lang="en-US" sz="900" b="0" i="0" u="none" strike="noStrike" kern="1200" cap="none" spc="0" normalizeH="0" baseline="0" noProof="0" dirty="0" err="1">
-                <a:ln>
-                  <a:noFill/>
-                </a:ln>
-                <a:solidFill>
-                  <a:prstClr val="black"/>
-                </a:solidFill>
-                <a:effectLst/>
-                <a:uLnTx/>
-                <a:uFillTx/>
-                <a:latin typeface="Ubuntu"/>
-                <a:ea typeface="+mn-ea"/>
-                <a:cs typeface="+mn-cs"/>
-              </a:rPr>
-              <a:t>CANoe</a:t>
-            </a:r>
-            <a:r>
-              <a:rPr kumimoji="0" lang="en-US" sz="900" b="0" i="0" u="none" strike="noStrike" kern="1200" cap="none" spc="0" normalizeH="0" baseline="0" noProof="0" dirty="0">
-                <a:ln>
-                  <a:noFill/>
-                </a:ln>
-                <a:solidFill>
-                  <a:prstClr val="black"/>
-                </a:solidFill>
-                <a:effectLst/>
-                <a:uLnTx/>
-                <a:uFillTx/>
-                <a:latin typeface="Ubuntu"/>
-                <a:ea typeface="+mn-ea"/>
-                <a:cs typeface="+mn-cs"/>
-              </a:rPr>
-              <a:t>, Jenkins, and RTC in V-cycle and Agile environments.</a:t>
-            </a:r>
-          </a:p>
-          <a:p>
-            <a:pPr marL="0" marR="0" lvl="0" indent="0" algn="l" defTabSz="914400" rtl="0" eaLnBrk="1" fontAlgn="auto" latinLnBrk="0" hangingPunct="1">
-              <a:lnSpc>
-                <a:spcPct val="100000"/>
-              </a:lnSpc>
-              <a:spcBef>
-                <a:spcPts val="0"/>
-              </a:spcBef>
-              <a:spcAft>
-                <a:spcPts val="0"/>
-              </a:spcAft>
-              <a:buClrTx/>
-              <a:buSzTx/>
-              <a:buFontTx/>
-              <a:buNone/>
-              <a:tabLst/>
-              <a:defRPr/>
-            </a:pPr>
-            <a:r>
-              <a:rPr kumimoji="0" lang="en-US" sz="900" b="1" i="0" u="none" strike="noStrike" kern="1200" cap="none" spc="0" normalizeH="0" baseline="0" noProof="0" dirty="0">
-                <a:ln>
-                  <a:noFill/>
-                </a:ln>
-                <a:solidFill>
-                  <a:prstClr val="black"/>
-                </a:solidFill>
-                <a:effectLst/>
-                <a:uLnTx/>
-                <a:uFillTx/>
-                <a:latin typeface="Ubuntu"/>
-                <a:ea typeface="+mn-ea"/>
-                <a:cs typeface="+mn-cs"/>
-              </a:rPr>
-              <a:t>Embedded Software Engineer</a:t>
-            </a:r>
-            <a:r>
-              <a:rPr kumimoji="0" lang="en-US" sz="900" b="0" i="0" u="none" strike="noStrike" kern="1200" cap="none" spc="0" normalizeH="0" baseline="0" noProof="0" dirty="0">
-                <a:ln>
-                  <a:noFill/>
-                </a:ln>
-                <a:solidFill>
-                  <a:prstClr val="black"/>
-                </a:solidFill>
-                <a:effectLst/>
-                <a:uLnTx/>
-                <a:uFillTx/>
-                <a:latin typeface="Ubuntu"/>
-                <a:ea typeface="+mn-ea"/>
-                <a:cs typeface="+mn-cs"/>
-              </a:rPr>
-              <a:t> </a:t>
-            </a:r>
-            <a:r>
-              <a:rPr kumimoji="0" lang="en-US" sz="900" b="0" i="1" u="none" strike="noStrike" kern="1200" cap="none" spc="0" normalizeH="0" baseline="0" noProof="0" dirty="0">
-                <a:ln>
-                  <a:noFill/>
-                </a:ln>
-                <a:solidFill>
-                  <a:prstClr val="black"/>
-                </a:solidFill>
-                <a:effectLst/>
-                <a:uLnTx/>
-                <a:uFillTx/>
-                <a:latin typeface="Ubuntu"/>
-                <a:ea typeface="+mn-ea"/>
-                <a:cs typeface="+mn-cs"/>
-              </a:rPr>
-              <a:t>(Aug 2010 – May 2014)</a:t>
+              <a:t>      (Aug 2010 – May 2014)</a:t>
             </a:r>
             <a:endParaRPr kumimoji="0" lang="en-US" sz="900" b="0" i="0" u="none" strike="noStrike" kern="1200" cap="none" spc="0" normalizeH="0" baseline="0" noProof="0" dirty="0">
               <a:ln>
@@ -3990,7 +3725,7 @@
                 <a:latin typeface="Ubuntu" panose="020B0504030602030204" pitchFamily="34" charset="0"/>
                 <a:ea typeface="Verdana" panose="020B0604030504040204" pitchFamily="34" charset="0"/>
               </a:rPr>
-              <a:t>Embedded C</a:t>
+              <a:t>Embedded C SW development</a:t>
             </a:r>
           </a:p>
           <a:p>
@@ -4462,7 +4197,7 @@
                 <a:ea typeface="Verdana" panose="020B0604030504040204" pitchFamily="34" charset="0"/>
                 <a:cs typeface="+mn-cs"/>
               </a:rPr>
-              <a:t>Romanian</a:t>
+              <a:t>Romanian native</a:t>
             </a:r>
           </a:p>
           <a:p>
@@ -4498,7 +4233,36 @@
                 <a:ea typeface="Verdana" panose="020B0604030504040204" pitchFamily="34" charset="0"/>
                 <a:cs typeface="+mn-cs"/>
               </a:rPr>
-              <a:t>English </a:t>
+              <a:t>English C2</a:t>
+            </a:r>
+          </a:p>
+          <a:p>
+            <a:pPr marL="171442" marR="0" lvl="0" indent="-171442" algn="l" defTabSz="914358" rtl="0" eaLnBrk="1" fontAlgn="auto" latinLnBrk="0" hangingPunct="1">
+              <a:lnSpc>
+                <a:spcPct val="100000"/>
+              </a:lnSpc>
+              <a:spcBef>
+                <a:spcPts val="100"/>
+              </a:spcBef>
+              <a:spcAft>
+                <a:spcPts val="100"/>
+              </a:spcAft>
+              <a:buClrTx/>
+              <a:buSzTx/>
+              <a:buFont typeface="Arial" panose="020B0604020202020204" pitchFamily="34" charset="0"/>
+              <a:buChar char="•"/>
+              <a:tabLst/>
+              <a:defRPr/>
+            </a:pPr>
+            <a:r>
+              <a:rPr lang="en-US" sz="1200" dirty="0">
+                <a:solidFill>
+                  <a:prstClr val="white"/>
+                </a:solidFill>
+                <a:latin typeface="Ubuntu" panose="020B0504030602030204" pitchFamily="34" charset="0"/>
+                <a:ea typeface="Verdana" panose="020B0604030504040204" pitchFamily="34" charset="0"/>
+              </a:rPr>
+              <a:t>German B1</a:t>
             </a:r>
             <a:endParaRPr kumimoji="0" lang="pl-PL" sz="1200" b="0" i="0" u="none" strike="noStrike" kern="1200" cap="none" spc="0" normalizeH="0" baseline="0" noProof="0" dirty="0">
               <a:ln>
@@ -5344,15 +5108,6 @@
 </file>
 
 <file path=customXml/item2.xml><?xml version="1.0" encoding="utf-8"?>
-<?mso-contentType ?>
-<FormTemplates xmlns="http://schemas.microsoft.com/sharepoint/v3/contenttype/forms">
-  <Display>DocumentLibraryForm</Display>
-  <Edit>DocumentLibraryForm</Edit>
-  <New>DocumentLibraryForm</New>
-</FormTemplates>
-</file>
-
-<file path=customXml/item3.xml><?xml version="1.0" encoding="utf-8"?>
 <ct:contentTypeSchema xmlns:ct="http://schemas.microsoft.com/office/2006/metadata/contentType" xmlns:ma="http://schemas.microsoft.com/office/2006/metadata/properties/metaAttributes" ct:_="" ma:_="" ma:contentTypeName="Document" ma:contentTypeID="0x01010028379B9164345D4B9FEA71B5C6DA0501" ma:contentTypeVersion="12" ma:contentTypeDescription="Create a new document." ma:contentTypeScope="" ma:versionID="25a509c6a27b952c0dae28f88f47ece3">
   <xsd:schema xmlns:xsd="http://www.w3.org/2001/XMLSchema" xmlns:xs="http://www.w3.org/2001/XMLSchema" xmlns:p="http://schemas.microsoft.com/office/2006/metadata/properties" xmlns:ns2="cddac4ca-1f9a-48ec-a052-f880be6be43c" xmlns:ns3="70ba0579-5a3d-4697-904b-f432645238e6" targetNamespace="http://schemas.microsoft.com/office/2006/metadata/properties" ma:root="true" ma:fieldsID="3585157dcfd28b9b0093472ca559abd9" ns2:_="" ns3:_="">
     <xsd:import namespace="cddac4ca-1f9a-48ec-a052-f880be6be43c"/>
@@ -5569,6 +5324,15 @@
 </ct:contentTypeSchema>
 </file>
 
+<file path=customXml/item3.xml><?xml version="1.0" encoding="utf-8"?>
+<?mso-contentType ?>
+<FormTemplates xmlns="http://schemas.microsoft.com/sharepoint/v3/contenttype/forms">
+  <Display>DocumentLibraryForm</Display>
+  <Edit>DocumentLibraryForm</Edit>
+  <New>DocumentLibraryForm</New>
+</FormTemplates>
+</file>
+
 <file path=customXml/itemProps1.xml><?xml version="1.0" encoding="utf-8"?>
 <ds:datastoreItem xmlns:ds="http://schemas.openxmlformats.org/officeDocument/2006/customXml" ds:itemID="{8765F6DA-EDFD-4C3F-B2EB-EDE359E124E2}">
   <ds:schemaRefs>
@@ -5587,14 +5351,6 @@
 </file>
 
 <file path=customXml/itemProps2.xml><?xml version="1.0" encoding="utf-8"?>
-<ds:datastoreItem xmlns:ds="http://schemas.openxmlformats.org/officeDocument/2006/customXml" ds:itemID="{93B09ECE-D1C0-42A5-B69E-8C88764DB9F3}">
-  <ds:schemaRefs>
-    <ds:schemaRef ds:uri="http://schemas.microsoft.com/sharepoint/v3/contenttype/forms"/>
-  </ds:schemaRefs>
-</ds:datastoreItem>
-</file>
-
-<file path=customXml/itemProps3.xml><?xml version="1.0" encoding="utf-8"?>
 <ds:datastoreItem xmlns:ds="http://schemas.openxmlformats.org/officeDocument/2006/customXml" ds:itemID="{DB6846BF-D536-4981-BB4E-DAFD3540F1ED}">
   <ds:schemaRefs>
     <ds:schemaRef ds:uri="http://schemas.microsoft.com/office/2006/metadata/contentType"/>
@@ -5613,6 +5369,14 @@
 </ds:datastoreItem>
 </file>
 
+<file path=customXml/itemProps3.xml><?xml version="1.0" encoding="utf-8"?>
+<ds:datastoreItem xmlns:ds="http://schemas.openxmlformats.org/officeDocument/2006/customXml" ds:itemID="{93B09ECE-D1C0-42A5-B69E-8C88764DB9F3}">
+  <ds:schemaRefs>
+    <ds:schemaRef ds:uri="http://schemas.microsoft.com/sharepoint/v3/contenttype/forms"/>
+  </ds:schemaRefs>
+</ds:datastoreItem>
+</file>
+
 <file path=docMetadata/LabelInfo.xml><?xml version="1.0" encoding="utf-8"?>
 <clbl:labelList xmlns:clbl="http://schemas.microsoft.com/office/2020/mipLabelMetadata">
   <clbl:label id="{76a2ae5a-9f00-4f6b-95ed-5d33d77c4d61}" enabled="0" method="" siteId="{76a2ae5a-9f00-4f6b-95ed-5d33d77c4d61}" removed="1"/>

--- a/CV/RBU_v2.pptx
+++ b/CV/RBU_v2.pptx
@@ -250,7 +250,7 @@
             <a:fld id="{86C988DC-9DE3-4390-97AB-D61B85DACE57}" type="datetimeFigureOut">
               <a:rPr lang="pt-PT" sz="900" smtClean="0"/>
               <a:pPr/>
-              <a:t>27/11/2025</a:t>
+              <a:t>20/02/2026</a:t>
             </a:fld>
             <a:endParaRPr lang="pt-PT" sz="900"/>
           </a:p>
@@ -429,7 +429,7 @@
             <a:fld id="{0835B8F7-DAC4-4931-8AED-4356A8B2FD64}" type="datetimeFigureOut">
               <a:rPr lang="pt-BR" smtClean="0"/>
               <a:pPr/>
-              <a:t>27/11/2025</a:t>
+              <a:t>20/02/2026</a:t>
             </a:fld>
             <a:endParaRPr lang="pt-BR"/>
           </a:p>
@@ -2020,8 +2020,8 @@
         </p:nvSpPr>
         <p:spPr>
           <a:xfrm>
-            <a:off x="7419282" y="905773"/>
-            <a:ext cx="4363350" cy="5832871"/>
+            <a:off x="7419282" y="729377"/>
+            <a:ext cx="4363350" cy="6078566"/>
           </a:xfrm>
           <a:prstGeom prst="rect">
             <a:avLst/>
@@ -4281,36 +4281,6 @@
           </a:p>
         </p:txBody>
       </p:sp>
-      <p:pic>
-        <p:nvPicPr>
-          <p:cNvPr id="7" name="Picture 6">
-            <a:extLst>
-              <a:ext uri="{FF2B5EF4-FFF2-40B4-BE49-F238E27FC236}">
-                <a16:creationId xmlns:a16="http://schemas.microsoft.com/office/drawing/2014/main" id="{55039376-14FA-E801-F91A-D0ED69B3C7F1}"/>
-              </a:ext>
-            </a:extLst>
-          </p:cNvPr>
-          <p:cNvPicPr>
-            <a:picLocks noChangeAspect="1"/>
-          </p:cNvPicPr>
-          <p:nvPr/>
-        </p:nvPicPr>
-        <p:blipFill>
-          <a:blip r:embed="rId2"/>
-          <a:stretch>
-            <a:fillRect/>
-          </a:stretch>
-        </p:blipFill>
-        <p:spPr>
-          <a:xfrm>
-            <a:off x="118991" y="6553738"/>
-            <a:ext cx="3721429" cy="254204"/>
-          </a:xfrm>
-          <a:prstGeom prst="rect">
-            <a:avLst/>
-          </a:prstGeom>
-        </p:spPr>
-      </p:pic>
       <p:sp>
         <p:nvSpPr>
           <p:cNvPr id="4" name="TextBox 3">
@@ -4325,7 +4295,7 @@
         </p:nvSpPr>
         <p:spPr>
           <a:xfrm>
-            <a:off x="4069228" y="564517"/>
+            <a:off x="4069228" y="461005"/>
             <a:ext cx="2971275" cy="276999"/>
           </a:xfrm>
           <a:prstGeom prst="rect">
@@ -4425,7 +4395,7 @@
         </p:nvSpPr>
         <p:spPr>
           <a:xfrm>
-            <a:off x="7328920" y="564517"/>
+            <a:off x="7328920" y="452377"/>
             <a:ext cx="1606530" cy="276999"/>
           </a:xfrm>
           <a:prstGeom prst="rect">
@@ -5108,6 +5078,15 @@
 </file>
 
 <file path=customXml/item2.xml><?xml version="1.0" encoding="utf-8"?>
+<?mso-contentType ?>
+<FormTemplates xmlns="http://schemas.microsoft.com/sharepoint/v3/contenttype/forms">
+  <Display>DocumentLibraryForm</Display>
+  <Edit>DocumentLibraryForm</Edit>
+  <New>DocumentLibraryForm</New>
+</FormTemplates>
+</file>
+
+<file path=customXml/item3.xml><?xml version="1.0" encoding="utf-8"?>
 <ct:contentTypeSchema xmlns:ct="http://schemas.microsoft.com/office/2006/metadata/contentType" xmlns:ma="http://schemas.microsoft.com/office/2006/metadata/properties/metaAttributes" ct:_="" ma:_="" ma:contentTypeName="Document" ma:contentTypeID="0x01010028379B9164345D4B9FEA71B5C6DA0501" ma:contentTypeVersion="12" ma:contentTypeDescription="Create a new document." ma:contentTypeScope="" ma:versionID="25a509c6a27b952c0dae28f88f47ece3">
   <xsd:schema xmlns:xsd="http://www.w3.org/2001/XMLSchema" xmlns:xs="http://www.w3.org/2001/XMLSchema" xmlns:p="http://schemas.microsoft.com/office/2006/metadata/properties" xmlns:ns2="cddac4ca-1f9a-48ec-a052-f880be6be43c" xmlns:ns3="70ba0579-5a3d-4697-904b-f432645238e6" targetNamespace="http://schemas.microsoft.com/office/2006/metadata/properties" ma:root="true" ma:fieldsID="3585157dcfd28b9b0093472ca559abd9" ns2:_="" ns3:_="">
     <xsd:import namespace="cddac4ca-1f9a-48ec-a052-f880be6be43c"/>
@@ -5324,15 +5303,6 @@
 </ct:contentTypeSchema>
 </file>
 
-<file path=customXml/item3.xml><?xml version="1.0" encoding="utf-8"?>
-<?mso-contentType ?>
-<FormTemplates xmlns="http://schemas.microsoft.com/sharepoint/v3/contenttype/forms">
-  <Display>DocumentLibraryForm</Display>
-  <Edit>DocumentLibraryForm</Edit>
-  <New>DocumentLibraryForm</New>
-</FormTemplates>
-</file>
-
 <file path=customXml/itemProps1.xml><?xml version="1.0" encoding="utf-8"?>
 <ds:datastoreItem xmlns:ds="http://schemas.openxmlformats.org/officeDocument/2006/customXml" ds:itemID="{8765F6DA-EDFD-4C3F-B2EB-EDE359E124E2}">
   <ds:schemaRefs>
@@ -5351,6 +5321,14 @@
 </file>
 
 <file path=customXml/itemProps2.xml><?xml version="1.0" encoding="utf-8"?>
+<ds:datastoreItem xmlns:ds="http://schemas.openxmlformats.org/officeDocument/2006/customXml" ds:itemID="{93B09ECE-D1C0-42A5-B69E-8C88764DB9F3}">
+  <ds:schemaRefs>
+    <ds:schemaRef ds:uri="http://schemas.microsoft.com/sharepoint/v3/contenttype/forms"/>
+  </ds:schemaRefs>
+</ds:datastoreItem>
+</file>
+
+<file path=customXml/itemProps3.xml><?xml version="1.0" encoding="utf-8"?>
 <ds:datastoreItem xmlns:ds="http://schemas.openxmlformats.org/officeDocument/2006/customXml" ds:itemID="{DB6846BF-D536-4981-BB4E-DAFD3540F1ED}">
   <ds:schemaRefs>
     <ds:schemaRef ds:uri="http://schemas.microsoft.com/office/2006/metadata/contentType"/>
@@ -5369,14 +5347,6 @@
 </ds:datastoreItem>
 </file>
 
-<file path=customXml/itemProps3.xml><?xml version="1.0" encoding="utf-8"?>
-<ds:datastoreItem xmlns:ds="http://schemas.openxmlformats.org/officeDocument/2006/customXml" ds:itemID="{93B09ECE-D1C0-42A5-B69E-8C88764DB9F3}">
-  <ds:schemaRefs>
-    <ds:schemaRef ds:uri="http://schemas.microsoft.com/sharepoint/v3/contenttype/forms"/>
-  </ds:schemaRefs>
-</ds:datastoreItem>
-</file>
-
 <file path=docMetadata/LabelInfo.xml><?xml version="1.0" encoding="utf-8"?>
 <clbl:labelList xmlns:clbl="http://schemas.microsoft.com/office/2020/mipLabelMetadata">
   <clbl:label id="{76a2ae5a-9f00-4f6b-95ed-5d33d77c4d61}" enabled="0" method="" siteId="{76a2ae5a-9f00-4f6b-95ed-5d33d77c4d61}" removed="1"/>
